--- a/Topic_B/Exam_Practice/TB-L02_Writing_Workshop_Family_Friends_and_Relationships.pptx
+++ b/Topic_B/Exam_Practice/TB-L02_Writing_Workshop_Family_Friends_and_Relationships.pptx
@@ -784,7 +784,11 @@
           <a:lstStyle/>
           <a:p>
             <a:r>
-              <a:rPr lang="en-US" dirty="0"/>
+              <a:rPr lang="ar-SA" dirty="0">
+                <a:latin typeface="Amiri" pitchFamily="2" charset="-78"/>
+                <a:ea typeface="Amiri" pitchFamily="2" charset="-78"/>
+                <a:cs typeface="Amiri" pitchFamily="2" charset="-78"/>
+              </a:rPr>
               <a:t>Q3 (3 min to choose and read). Title (أ) suits Core and Develop; title (ب) suits Stretch.</a:t>
             </a:r>
             <a:endParaRPr lang="en-US" dirty="0"/>
@@ -1403,7 +1407,11 @@
           <a:lstStyle/>
           <a:p>
             <a:r>
-              <a:rPr lang="en-US" dirty="0"/>
+              <a:rPr lang="ar-SA" dirty="0">
+                <a:latin typeface="Amiri" pitchFamily="2" charset="-78"/>
+                <a:ea typeface="Amiri" pitchFamily="2" charset="-78"/>
+                <a:cs typeface="Amiri" pitchFamily="2" charset="-78"/>
+              </a:rPr>
               <a:t>WELCOME (1 min) — while students join.
 • Greet each student by name as they arrive: السَّلَامُ عَلَيْكُمْ. Take the register (Pastoral Tracker: attendance 0/1).
 • 2-MINUTE CHECK-IN (SEND training): a private chat to any student who seemed unsettled last lesson — “Are you okay today? 👍 / 👎”.
@@ -1936,7 +1944,11 @@
           <a:lstStyle/>
           <a:p>
             <a:r>
-              <a:rPr lang="en-US" dirty="0"/>
+              <a:rPr lang="ar-SA" dirty="0">
+                <a:latin typeface="Amiri" pitchFamily="2" charset="-78"/>
+                <a:ea typeface="Amiri" pitchFamily="2" charset="-78"/>
+                <a:cs typeface="Amiri" pitchFamily="2" charset="-78"/>
+              </a:rPr>
               <a:t>Question words: مَنْ (who) · مَاذَا (what) · صِفْ (describe) · هَلْ (yes/no) · مَا (what) — bullet 3 uses the DUAL past: فَعَلْتُمَا (you two did).</a:t>
             </a:r>
             <a:endParaRPr lang="en-US" dirty="0"/>
@@ -2508,6 +2520,7 @@
                   <a:srgbClr val="D4AF37"/>
                 </a:solidFill>
                 <a:latin typeface="Amiri" pitchFamily="2" charset="-78"/>
+                <a:ea typeface="Amiri" pitchFamily="2" charset="-78"/>
                 <a:cs typeface="Amiri" pitchFamily="2" charset="-78"/>
               </a:rPr>
               <a:t>م</a:t>
@@ -2714,6 +2727,7 @@
                   <a:srgbClr val="D4AF37"/>
                 </a:solidFill>
                 <a:latin typeface="Amiri" pitchFamily="2" charset="-78"/>
+                <a:ea typeface="Amiri" pitchFamily="2" charset="-78"/>
                 <a:cs typeface="Amiri" pitchFamily="2" charset="-78"/>
               </a:rPr>
               <a:t>وَرْشَةُ الكِتَابَةِ — العَائِلَةُ وَالأَصْدِقَاءُ</a:t>
@@ -3171,6 +3185,7 @@
                   <a:srgbClr val="D4AF37"/>
                 </a:solidFill>
                 <a:latin typeface="Amiri" pitchFamily="2" charset="-78"/>
+                <a:ea typeface="Amiri" pitchFamily="2" charset="-78"/>
                 <a:cs typeface="Amiri" pitchFamily="2" charset="-78"/>
               </a:rPr>
               <a:t>م</a:t>
@@ -3491,6 +3506,7 @@
                   <a:srgbClr val="8A6D1E"/>
                 </a:solidFill>
                 <a:latin typeface="Amiri" pitchFamily="2" charset="-78"/>
+                <a:ea typeface="Amiri" pitchFamily="2" charset="-78"/>
                 <a:cs typeface="Amiri" pitchFamily="2" charset="-78"/>
               </a:rPr>
               <a:t>نَمُوذَجُ الإِجَابَةِ</a:t>
@@ -3604,6 +3620,7 @@
                   <a:srgbClr val="1F2A37"/>
                 </a:solidFill>
                 <a:latin typeface="Amiri" pitchFamily="2" charset="-78"/>
+                <a:ea typeface="Amiri" pitchFamily="2" charset="-78"/>
                 <a:cs typeface="Amiri" pitchFamily="2" charset="-78"/>
               </a:rPr>
               <a:t>مَرْحَبًا يَا خَالِدُ،</a:t>
@@ -3623,6 +3640,7 @@
                   <a:srgbClr val="1F2A37"/>
                 </a:solidFill>
                 <a:latin typeface="Amiri" pitchFamily="2" charset="-78"/>
+                <a:ea typeface="Amiri" pitchFamily="2" charset="-78"/>
                 <a:cs typeface="Amiri" pitchFamily="2" charset="-78"/>
               </a:rPr>
               <a:t>كَيْفَ حَالُكَ؟ سَأُخْبِرُكَ عَنْ أُسْرَتِي. فِي أُسْرَتِي خَمْسَةُ أَشْخَاصٍ: أَبِي وَأُمِّي وَأُخْتَايَ وَأَنَا. أَبِي مُهَنْدِسٌ، وَأُمِّي مُعَلِّمَةٌ. أُخْتِي الكُبْرَى عُمْرُهَا ثَمَانِيَ عَشْرَةَ سَنَةً، وَهِيَ طَالِبَةٌ فِي الجَامِعَةِ. صَدِيقِي المُفَضَّلُ اسْمُهُ سَامِرٌ، وَهُوَ مَرِحٌ وَذَكِيٌّ. أَمْسِ لَعِبْنَا كُرَةَ القَدَمِ مَعًا فِي الحَدِيقَةِ. فِي العُطْلَةِ القَادِمَةِ سَنَزُورُ جَدِّي وَجَدَّتِي فِي مِصْرَ. وَأَنْتَ، كَمْ أَخًا عِنْدَكَ؟</a:t>
@@ -3642,6 +3660,7 @@
                   <a:srgbClr val="1F2A37"/>
                 </a:solidFill>
                 <a:latin typeface="Amiri" pitchFamily="2" charset="-78"/>
+                <a:ea typeface="Amiri" pitchFamily="2" charset="-78"/>
                 <a:cs typeface="Amiri" pitchFamily="2" charset="-78"/>
               </a:rPr>
               <a:t>مَعَ السَّلَامَةِ،</a:t>
@@ -3661,6 +3680,7 @@
                   <a:srgbClr val="1F2A37"/>
                 </a:solidFill>
                 <a:latin typeface="Amiri" pitchFamily="2" charset="-78"/>
+                <a:ea typeface="Amiri" pitchFamily="2" charset="-78"/>
                 <a:cs typeface="Amiri" pitchFamily="2" charset="-78"/>
               </a:rPr>
               <a:t>عُمَرُ</a:t>
@@ -3824,11 +3844,12 @@
               <a:buNone/>
             </a:pPr>
             <a:r>
-              <a:rPr lang="en-US" sz="950" b="1" dirty="0">
+              <a:rPr lang="ar-SA" sz="950" b="1" dirty="0">
                 <a:solidFill>
                   <a:srgbClr val="FFFFFF"/>
                 </a:solidFill>
                 <a:latin typeface="Calibri" pitchFamily="34" charset="0"/>
+                <a:ea typeface="Amiri" pitchFamily="2" charset="-78"/>
                 <a:cs typeface="Amiri" pitchFamily="2" charset="-78"/>
               </a:rPr>
               <a:t>أُخْتَايَ</a:t>
@@ -3889,11 +3910,12 @@
               <a:buNone/>
             </a:pPr>
             <a:r>
-              <a:rPr lang="en-US" sz="950" b="1" dirty="0">
+              <a:rPr lang="ar-SA" sz="950" b="1" dirty="0">
                 <a:solidFill>
                   <a:srgbClr val="FFFFFF"/>
                 </a:solidFill>
                 <a:latin typeface="Calibri" pitchFamily="34" charset="0"/>
+                <a:ea typeface="Amiri" pitchFamily="2" charset="-78"/>
                 <a:cs typeface="Amiri" pitchFamily="2" charset="-78"/>
               </a:rPr>
               <a:t>أُخْتِي الكُبْرَى</a:t>
@@ -3954,11 +3976,12 @@
               <a:buNone/>
             </a:pPr>
             <a:r>
-              <a:rPr lang="en-US" sz="950" b="1" dirty="0">
+              <a:rPr lang="ar-SA" sz="950" b="1" dirty="0">
                 <a:solidFill>
                   <a:srgbClr val="FFFFFF"/>
                 </a:solidFill>
                 <a:latin typeface="Calibri" pitchFamily="34" charset="0"/>
+                <a:ea typeface="Amiri" pitchFamily="2" charset="-78"/>
                 <a:cs typeface="Amiri" pitchFamily="2" charset="-78"/>
               </a:rPr>
               <a:t>لَعِبْنَا … مَعًا</a:t>
@@ -4019,11 +4042,12 @@
               <a:buNone/>
             </a:pPr>
             <a:r>
-              <a:rPr lang="en-US" sz="950" b="1" dirty="0">
+              <a:rPr lang="ar-SA" sz="950" b="1" dirty="0">
                 <a:solidFill>
                   <a:srgbClr val="FFFFFF"/>
                 </a:solidFill>
                 <a:latin typeface="Calibri" pitchFamily="34" charset="0"/>
+                <a:ea typeface="Amiri" pitchFamily="2" charset="-78"/>
                 <a:cs typeface="Amiri" pitchFamily="2" charset="-78"/>
               </a:rPr>
               <a:t>سَنَزُورُ</a:t>
@@ -4157,6 +4181,7 @@
                   <a:srgbClr val="D4AF37"/>
                 </a:solidFill>
                 <a:latin typeface="Amiri" pitchFamily="2" charset="-78"/>
+                <a:ea typeface="Amiri" pitchFamily="2" charset="-78"/>
                 <a:cs typeface="Amiri" pitchFamily="2" charset="-78"/>
               </a:rPr>
               <a:t>م</a:t>
@@ -4477,6 +4502,7 @@
                   <a:srgbClr val="8A6D1E"/>
                 </a:solidFill>
                 <a:latin typeface="Amiri" pitchFamily="2" charset="-78"/>
+                <a:ea typeface="Amiri" pitchFamily="2" charset="-78"/>
                 <a:cs typeface="Amiri" pitchFamily="2" charset="-78"/>
               </a:rPr>
               <a:t>نَمُوذَجُ الإِجَابَةِ</a:t>
@@ -4590,6 +4616,7 @@
                   <a:srgbClr val="1F2A37"/>
                 </a:solidFill>
                 <a:latin typeface="Amiri" pitchFamily="2" charset="-78"/>
+                <a:ea typeface="Amiri" pitchFamily="2" charset="-78"/>
                 <a:cs typeface="Amiri" pitchFamily="2" charset="-78"/>
               </a:rPr>
               <a:t>عَزِيزِي خَالِدٌ،</a:t>
@@ -4609,6 +4636,7 @@
                   <a:srgbClr val="1F2A37"/>
                 </a:solidFill>
                 <a:latin typeface="Amiri" pitchFamily="2" charset="-78"/>
+                <a:ea typeface="Amiri" pitchFamily="2" charset="-78"/>
                 <a:cs typeface="Amiri" pitchFamily="2" charset="-78"/>
               </a:rPr>
               <a:t>تَحِيَّةً طَيِّبَةً، وَبَعْدُ، فَقَدْ سَأَلْتَنِي فِي رِسَالَتِكَ عَنْ أُسْرَتِي وَأَصْدِقَائِي. أُسْرَتِي صَغِيرَةٌ لٰكِنَّهَا قَرِيبَةٌ جِدًّا مِنْ بَعْضِهَا: أَبِي مُهَنْدِسٌ يَعْمَلُ سَاعَاتٍ طَوِيلَةً، وَأُمِّي مُعَلِّمَةٌ صَبُورَةٌ، وَعِنْدِي أُخْتَانِ؛ الكُبْرَى تَدْرُسُ الطِّبَّ، وَالصُّغْرَى فِي المَدْرَسَةِ الابْتِدَائِيَّةِ. أَتَّفِقُ مَعَهُمَا عَادَةً، غَيْرَ أَنَّنَا نَتَشَاجَرُ أَحْيَانًا عَلَى التِّلْفَازِ! أَمَّا صَدِيقِي المُفَضَّلُ سَامِرٌ فَأَعْرِفُهُ مُنْذُ عَشْرِ سَنَوَاتٍ؛ أَمْسِ سَاعَدَنِي فِي وَاجِبِ الرِّيَاضِيَّاتِ، ثُمَّ لَعِبْنَا مُبَارَاةً فِي الحَدِيقَةِ. فِي العُطْلَةِ القَادِمَةِ سَنُسَافِرُ إِلَى مِصْرَ لِنَزُورَ جَدِّي وَجَدَّتِي. وَأَنْتَ، هَلْ عِنْدَكَ إِخْوَةٌ؟ أَرْسِلْ لِي صُورَةَ أُسْرَتِكَ!</a:t>
@@ -4628,6 +4656,7 @@
                   <a:srgbClr val="1F2A37"/>
                 </a:solidFill>
                 <a:latin typeface="Amiri" pitchFamily="2" charset="-78"/>
+                <a:ea typeface="Amiri" pitchFamily="2" charset="-78"/>
                 <a:cs typeface="Amiri" pitchFamily="2" charset="-78"/>
               </a:rPr>
               <a:t>مَعَ تَحِيَّاتِي،</a:t>
@@ -4647,6 +4676,7 @@
                   <a:srgbClr val="1F2A37"/>
                 </a:solidFill>
                 <a:latin typeface="Amiri" pitchFamily="2" charset="-78"/>
+                <a:ea typeface="Amiri" pitchFamily="2" charset="-78"/>
                 <a:cs typeface="Amiri" pitchFamily="2" charset="-78"/>
               </a:rPr>
               <a:t>عُمَرُ</a:t>
@@ -4810,11 +4840,12 @@
               <a:buNone/>
             </a:pPr>
             <a:r>
-              <a:rPr lang="en-US" sz="950" b="1" dirty="0">
+              <a:rPr lang="ar-SA" sz="950" b="1" dirty="0">
                 <a:solidFill>
                   <a:srgbClr val="FFFFFF"/>
                 </a:solidFill>
                 <a:latin typeface="Calibri" pitchFamily="34" charset="0"/>
+                <a:ea typeface="Amiri" pitchFamily="2" charset="-78"/>
                 <a:cs typeface="Amiri" pitchFamily="2" charset="-78"/>
               </a:rPr>
               <a:t>عِنْدِي أُخْتَانِ</a:t>
@@ -4875,11 +4906,12 @@
               <a:buNone/>
             </a:pPr>
             <a:r>
-              <a:rPr lang="en-US" sz="950" b="1" dirty="0">
+              <a:rPr lang="ar-SA" sz="950" b="1" dirty="0">
                 <a:solidFill>
                   <a:srgbClr val="FFFFFF"/>
                 </a:solidFill>
                 <a:latin typeface="Calibri" pitchFamily="34" charset="0"/>
+                <a:ea typeface="Amiri" pitchFamily="2" charset="-78"/>
                 <a:cs typeface="Amiri" pitchFamily="2" charset="-78"/>
               </a:rPr>
               <a:t>أَتَّفِقُ مَعَهُمَا</a:t>
@@ -4940,11 +4972,12 @@
               <a:buNone/>
             </a:pPr>
             <a:r>
-              <a:rPr lang="en-US" sz="950" b="1" dirty="0">
+              <a:rPr lang="ar-SA" sz="950" b="1" dirty="0">
                 <a:solidFill>
                   <a:srgbClr val="FFFFFF"/>
                 </a:solidFill>
                 <a:latin typeface="Calibri" pitchFamily="34" charset="0"/>
+                <a:ea typeface="Amiri" pitchFamily="2" charset="-78"/>
                 <a:cs typeface="Amiri" pitchFamily="2" charset="-78"/>
               </a:rPr>
               <a:t>أَمَّا صَدِيقِي … فَأَعْرِفُهُ</a:t>
@@ -5005,11 +5038,12 @@
               <a:buNone/>
             </a:pPr>
             <a:r>
-              <a:rPr lang="en-US" sz="950" b="1" dirty="0">
+              <a:rPr lang="ar-SA" sz="950" b="1" dirty="0">
                 <a:solidFill>
                   <a:srgbClr val="FFFFFF"/>
                 </a:solidFill>
                 <a:latin typeface="Calibri" pitchFamily="34" charset="0"/>
+                <a:ea typeface="Amiri" pitchFamily="2" charset="-78"/>
                 <a:cs typeface="Amiri" pitchFamily="2" charset="-78"/>
               </a:rPr>
               <a:t>لِنَزُورَ</a:t>
@@ -5143,6 +5177,7 @@
                   <a:srgbClr val="D4AF37"/>
                 </a:solidFill>
                 <a:latin typeface="Amiri" pitchFamily="2" charset="-78"/>
+                <a:ea typeface="Amiri" pitchFamily="2" charset="-78"/>
                 <a:cs typeface="Amiri" pitchFamily="2" charset="-78"/>
               </a:rPr>
               <a:t>م</a:t>
@@ -5463,6 +5498,7 @@
                   <a:srgbClr val="8A6D1E"/>
                 </a:solidFill>
                 <a:latin typeface="Amiri" pitchFamily="2" charset="-78"/>
+                <a:ea typeface="Amiri" pitchFamily="2" charset="-78"/>
                 <a:cs typeface="Amiri" pitchFamily="2" charset="-78"/>
               </a:rPr>
               <a:t>اخْتَرْ عُنْوَانًا وَاحِدًا</a:t>
@@ -5743,6 +5779,7 @@
                   <a:srgbClr val="1B3B6F"/>
                 </a:solidFill>
                 <a:latin typeface="Amiri" pitchFamily="2" charset="-78"/>
+                <a:ea typeface="Amiri" pitchFamily="2" charset="-78"/>
                 <a:cs typeface="Amiri" pitchFamily="2" charset="-78"/>
               </a:rPr>
               <a:t>عَائِلَتِي وَأَنَا</a:t>
@@ -5781,6 +5818,7 @@
                   <a:srgbClr val="1B3B6F"/>
                 </a:solidFill>
                 <a:latin typeface="Amiri" pitchFamily="2" charset="-78"/>
+                <a:ea typeface="Amiri" pitchFamily="2" charset="-78"/>
                 <a:cs typeface="Amiri" pitchFamily="2" charset="-78"/>
               </a:rPr>
               <a:t>(أ)</a:t>
@@ -5887,6 +5925,7 @@
                   <a:srgbClr val="1B3B6F"/>
                 </a:solidFill>
                 <a:latin typeface="Amiri" pitchFamily="2" charset="-78"/>
+                <a:ea typeface="Amiri" pitchFamily="2" charset="-78"/>
                 <a:cs typeface="Amiri" pitchFamily="2" charset="-78"/>
               </a:rPr>
               <a:t>أَفْرَادُ أُسْرَتِكَ · عَلَاقَتُكَ بِهِمْ · مَوْقِفٌ لَا تَنْسَاهُ مَعَ أَحَدِهِمْ · مَاذَا تَعَلَّمْتَ؟ وَمَا خُطَطُكُمْ؟</a:t>
@@ -6018,6 +6057,7 @@
                   <a:srgbClr val="1B3B6F"/>
                 </a:solidFill>
                 <a:latin typeface="Amiri" pitchFamily="2" charset="-78"/>
+                <a:ea typeface="Amiri" pitchFamily="2" charset="-78"/>
                 <a:cs typeface="Amiri" pitchFamily="2" charset="-78"/>
               </a:rPr>
               <a:t>الصَّدَاقَةُ فِي عَصْرِ الإِنْتَرْنِتِ</a:t>
@@ -6056,6 +6096,7 @@
                   <a:srgbClr val="1B3B6F"/>
                 </a:solidFill>
                 <a:latin typeface="Amiri" pitchFamily="2" charset="-78"/>
+                <a:ea typeface="Amiri" pitchFamily="2" charset="-78"/>
                 <a:cs typeface="Amiri" pitchFamily="2" charset="-78"/>
               </a:rPr>
               <a:t>(ب)</a:t>
@@ -6159,6 +6200,7 @@
                   <a:srgbClr val="1B3B6F"/>
                 </a:solidFill>
                 <a:latin typeface="Amiri" pitchFamily="2" charset="-78"/>
+                <a:ea typeface="Amiri" pitchFamily="2" charset="-78"/>
                 <a:cs typeface="Amiri" pitchFamily="2" charset="-78"/>
               </a:rPr>
               <a:t>كَيْفَ تَغَيَّرَتِ الصَّدَاقَةُ؟ · المَاضِي وَالحَاضِرُ · تَجْرِبَةٌ شَخْصِيَّةٌ · رَأْيُكَ وَاقْتِرَاحُكَ</a:t>
@@ -6358,6 +6400,7 @@
                   <a:srgbClr val="D4AF37"/>
                 </a:solidFill>
                 <a:latin typeface="Amiri" pitchFamily="2" charset="-78"/>
+                <a:ea typeface="Amiri" pitchFamily="2" charset="-78"/>
                 <a:cs typeface="Amiri" pitchFamily="2" charset="-78"/>
               </a:rPr>
               <a:t>م</a:t>
@@ -6678,6 +6721,7 @@
                   <a:srgbClr val="8A6D1E"/>
                 </a:solidFill>
                 <a:latin typeface="Amiri" pitchFamily="2" charset="-78"/>
+                <a:ea typeface="Amiri" pitchFamily="2" charset="-78"/>
                 <a:cs typeface="Amiri" pitchFamily="2" charset="-78"/>
               </a:rPr>
               <a:t>خُطَّةُ الكِتَابَةِ</a:t>
@@ -7302,6 +7346,7 @@
                   <a:srgbClr val="1B3B6F"/>
                 </a:solidFill>
                 <a:latin typeface="Amiri" pitchFamily="2" charset="-78"/>
+                <a:ea typeface="Amiri" pitchFamily="2" charset="-78"/>
                 <a:cs typeface="Amiri" pitchFamily="2" charset="-78"/>
               </a:rPr>
               <a:t>عِنْدِي أَخٌ وَأُخْتَانِ.</a:t>
@@ -7401,6 +7446,7 @@
                   <a:srgbClr val="1B3B6F"/>
                 </a:solidFill>
                 <a:latin typeface="Amiri" pitchFamily="2" charset="-78"/>
+                <a:ea typeface="Amiri" pitchFamily="2" charset="-78"/>
                 <a:cs typeface="Amiri" pitchFamily="2" charset="-78"/>
               </a:rPr>
               <a:t>كُنَّا نَتَشَاجَرُ كَثِيرًا وَنَحْنُ صِغَارٌ.</a:t>
@@ -7500,6 +7546,7 @@
                   <a:srgbClr val="1B3B6F"/>
                 </a:solidFill>
                 <a:latin typeface="Amiri" pitchFamily="2" charset="-78"/>
+                <a:ea typeface="Amiri" pitchFamily="2" charset="-78"/>
                 <a:cs typeface="Amiri" pitchFamily="2" charset="-78"/>
               </a:rPr>
               <a:t>سَأَتَّصِلُ بِهِ كُلَّ أُسْبُوعٍ.</a:t>
@@ -7661,6 +7708,7 @@
                   <a:srgbClr val="1F2A37"/>
                 </a:solidFill>
                 <a:latin typeface="Amiri" pitchFamily="2" charset="-78"/>
+                <a:ea typeface="Amiri" pitchFamily="2" charset="-78"/>
                 <a:cs typeface="Amiri" pitchFamily="2" charset="-78"/>
               </a:rPr>
               <a:t>أ</a:t>
@@ -7687,6 +7735,7 @@
                   <a:srgbClr val="1F2A37"/>
                 </a:solidFill>
                 <a:latin typeface="Amiri" pitchFamily="2" charset="-78"/>
+                <a:ea typeface="Amiri" pitchFamily="2" charset="-78"/>
                 <a:cs typeface="Amiri" pitchFamily="2" charset="-78"/>
               </a:rPr>
               <a:t>ب</a:t>
@@ -7833,6 +7882,7 @@
                   <a:srgbClr val="D4AF37"/>
                 </a:solidFill>
                 <a:latin typeface="Amiri" pitchFamily="2" charset="-78"/>
+                <a:ea typeface="Amiri" pitchFamily="2" charset="-78"/>
                 <a:cs typeface="Amiri" pitchFamily="2" charset="-78"/>
               </a:rPr>
               <a:t>م</a:t>
@@ -8090,6 +8140,7 @@
                   <a:srgbClr val="8A6D1E"/>
                 </a:solidFill>
                 <a:latin typeface="Amiri" pitchFamily="2" charset="-78"/>
+                <a:ea typeface="Amiri" pitchFamily="2" charset="-78"/>
                 <a:cs typeface="Amiri" pitchFamily="2" charset="-78"/>
               </a:rPr>
               <a:t>أ</a:t>
@@ -8154,6 +8205,7 @@
                   <a:srgbClr val="1B3B6F"/>
                 </a:solidFill>
                 <a:latin typeface="Amiri" pitchFamily="2" charset="-78"/>
+                <a:ea typeface="Amiri" pitchFamily="2" charset="-78"/>
                 <a:cs typeface="Amiri" pitchFamily="2" charset="-78"/>
               </a:rPr>
               <a:t>أ</a:t>
@@ -8205,6 +8257,7 @@
                   <a:srgbClr val="8A6D1E"/>
                 </a:solidFill>
                 <a:latin typeface="Amiri" pitchFamily="2" charset="-78"/>
+                <a:ea typeface="Amiri" pitchFamily="2" charset="-78"/>
                 <a:cs typeface="Amiri" pitchFamily="2" charset="-78"/>
               </a:rPr>
               <a:t>نَمُوذَجُ الإِجَابَةِ</a:t>
@@ -8318,6 +8371,7 @@
                   <a:srgbClr val="1F2A37"/>
                 </a:solidFill>
                 <a:latin typeface="Amiri" pitchFamily="2" charset="-78"/>
+                <a:ea typeface="Amiri" pitchFamily="2" charset="-78"/>
                 <a:cs typeface="Amiri" pitchFamily="2" charset="-78"/>
               </a:rPr>
               <a:t>أُحِبُّ أُسْرَتِي كَثِيرًا. فِي بَيْتِنَا سِتَّةُ أَشْخَاصٍ: أَبِي وَأُمِّي وَجَدَّتِي وَأَخِي وَأُخْتِي وَأَنَا. أَبِي يَعْمَلُ فِي مَطْعَمٍ، وَأُمِّي تَعْمَلُ فِي مُسْتَشْفًى. جَدَّتِي تَسْكُنُ مَعَنَا، وَهِيَ تَطْبُخُ أَكْلًا لَذِيذًا، وَتَحْكِي لَنَا قِصَصًا جَمِيلَةً.</a:t>
@@ -8337,6 +8391,7 @@
                   <a:srgbClr val="1F2A37"/>
                 </a:solidFill>
                 <a:latin typeface="Amiri" pitchFamily="2" charset="-78"/>
+                <a:ea typeface="Amiri" pitchFamily="2" charset="-78"/>
                 <a:cs typeface="Amiri" pitchFamily="2" charset="-78"/>
               </a:rPr>
               <a:t>أَخِي الأَكْبَرُ عُمْرُهُ عِشْرُونَ سَنَةً، وَهُوَ يَدْرُسُ فِي الجَامِعَةِ. أُخْتِي الصُّغْرَى عُمْرُهَا ثَمَانِي سَنَوَاتٍ، وَهِيَ مُضْحِكَةٌ جِدًّا. أَتَّفِقُ مَعَ أُخْتِي، لٰكِنِّي أَتَشَاجَرُ مَعَ أَخِي أَحْيَانًا، لِأَنَّهُ يَأْخُذُ هَاتِفِي.</a:t>
@@ -8356,6 +8411,7 @@
                   <a:srgbClr val="1F2A37"/>
                 </a:solidFill>
                 <a:latin typeface="Amiri" pitchFamily="2" charset="-78"/>
+                <a:ea typeface="Amiri" pitchFamily="2" charset="-78"/>
                 <a:cs typeface="Amiri" pitchFamily="2" charset="-78"/>
               </a:rPr>
               <a:t>صَدِيقَتِي المُفَضَّلَةُ اسْمُهَا لَيْلَى. تَعَرَّفْتُ إِلَيْهَا فِي المَدْرَسَةِ قَبْلَ خَمْسِ سَنَوَاتٍ. فِي الأُسْبُوعِ المَاضِي ذَهَبْنَا إِلَى السِّينَمَا مَعًا، وَأَكَلْنَا الفُشَارَ، وَضَحِكْنَا كَثِيرًا. هِيَ ذَكِيَّةٌ وَلَطِيفَةٌ، وَتُسَاعِدُنِي فِي الوَاجِبَاتِ.</a:t>
@@ -8375,6 +8431,7 @@
                   <a:srgbClr val="1F2A37"/>
                 </a:solidFill>
                 <a:latin typeface="Amiri" pitchFamily="2" charset="-78"/>
+                <a:ea typeface="Amiri" pitchFamily="2" charset="-78"/>
                 <a:cs typeface="Amiri" pitchFamily="2" charset="-78"/>
               </a:rPr>
               <a:t>فِي رَأْيِي، الأُسْرَةُ وَالأَصْدِقَاءُ أَهَمُّ شَيْءٍ فِي الحَيَاةِ، لِأَنَّهُمْ يُسَاعِدُونَنَا دَائِمًا. فِي الصَّيْفِ القَادِمِ سَنَزُورُ خَالَتِي فِي دُبَيٍّ، وَسَأَلْعَبُ مَعَ بَنَاتِ خَالَتِي.</a:t>
@@ -8538,11 +8595,12 @@
               <a:buNone/>
             </a:pPr>
             <a:r>
-              <a:rPr lang="en-US" sz="950" b="1" dirty="0">
+              <a:rPr lang="ar-SA" sz="950" b="1" dirty="0">
                 <a:solidFill>
                   <a:srgbClr val="FFFFFF"/>
                 </a:solidFill>
                 <a:latin typeface="Calibri" pitchFamily="34" charset="0"/>
+                <a:ea typeface="Amiri" pitchFamily="2" charset="-78"/>
                 <a:cs typeface="Amiri" pitchFamily="2" charset="-78"/>
               </a:rPr>
               <a:t>سِتَّةُ أَشْخَاصٍ</a:t>
@@ -8603,11 +8661,12 @@
               <a:buNone/>
             </a:pPr>
             <a:r>
-              <a:rPr lang="en-US" sz="950" b="1" dirty="0">
+              <a:rPr lang="ar-SA" sz="950" b="1" dirty="0">
                 <a:solidFill>
                   <a:srgbClr val="FFFFFF"/>
                 </a:solidFill>
                 <a:latin typeface="Calibri" pitchFamily="34" charset="0"/>
+                <a:ea typeface="Amiri" pitchFamily="2" charset="-78"/>
                 <a:cs typeface="Amiri" pitchFamily="2" charset="-78"/>
               </a:rPr>
               <a:t>أَخِي الأَكْبَرُ</a:t>
@@ -8668,11 +8727,12 @@
               <a:buNone/>
             </a:pPr>
             <a:r>
-              <a:rPr lang="en-US" sz="950" b="1" dirty="0">
+              <a:rPr lang="ar-SA" sz="950" b="1" dirty="0">
                 <a:solidFill>
                   <a:srgbClr val="FFFFFF"/>
                 </a:solidFill>
                 <a:latin typeface="Calibri" pitchFamily="34" charset="0"/>
+                <a:ea typeface="Amiri" pitchFamily="2" charset="-78"/>
                 <a:cs typeface="Amiri" pitchFamily="2" charset="-78"/>
               </a:rPr>
               <a:t>تَعَرَّفْتُ إِلَيْهَا</a:t>
@@ -8733,11 +8793,12 @@
               <a:buNone/>
             </a:pPr>
             <a:r>
-              <a:rPr lang="en-US" sz="950" b="1" dirty="0">
+              <a:rPr lang="ar-SA" sz="950" b="1" dirty="0">
                 <a:solidFill>
                   <a:srgbClr val="FFFFFF"/>
                 </a:solidFill>
                 <a:latin typeface="Calibri" pitchFamily="34" charset="0"/>
+                <a:ea typeface="Amiri" pitchFamily="2" charset="-78"/>
                 <a:cs typeface="Amiri" pitchFamily="2" charset="-78"/>
               </a:rPr>
               <a:t>سَنَزُورُ خَالَتِي</a:t>
@@ -8871,6 +8932,7 @@
                   <a:srgbClr val="D4AF37"/>
                 </a:solidFill>
                 <a:latin typeface="Amiri" pitchFamily="2" charset="-78"/>
+                <a:ea typeface="Amiri" pitchFamily="2" charset="-78"/>
                 <a:cs typeface="Amiri" pitchFamily="2" charset="-78"/>
               </a:rPr>
               <a:t>م</a:t>
@@ -9128,6 +9190,7 @@
                   <a:srgbClr val="8A6D1E"/>
                 </a:solidFill>
                 <a:latin typeface="Amiri" pitchFamily="2" charset="-78"/>
+                <a:ea typeface="Amiri" pitchFamily="2" charset="-78"/>
                 <a:cs typeface="Amiri" pitchFamily="2" charset="-78"/>
               </a:rPr>
               <a:t>أ</a:t>
@@ -9192,6 +9255,7 @@
                   <a:srgbClr val="1B3B6F"/>
                 </a:solidFill>
                 <a:latin typeface="Amiri" pitchFamily="2" charset="-78"/>
+                <a:ea typeface="Amiri" pitchFamily="2" charset="-78"/>
                 <a:cs typeface="Amiri" pitchFamily="2" charset="-78"/>
               </a:rPr>
               <a:t>أ</a:t>
@@ -9243,6 +9307,7 @@
                   <a:srgbClr val="8A6D1E"/>
                 </a:solidFill>
                 <a:latin typeface="Amiri" pitchFamily="2" charset="-78"/>
+                <a:ea typeface="Amiri" pitchFamily="2" charset="-78"/>
                 <a:cs typeface="Amiri" pitchFamily="2" charset="-78"/>
               </a:rPr>
               <a:t>نَمُوذَجُ الإِجَابَةِ</a:t>
@@ -9356,6 +9421,7 @@
                   <a:srgbClr val="1F2A37"/>
                 </a:solidFill>
                 <a:latin typeface="Amiri" pitchFamily="2" charset="-78"/>
+                <a:ea typeface="Amiri" pitchFamily="2" charset="-78"/>
                 <a:cs typeface="Amiri" pitchFamily="2" charset="-78"/>
               </a:rPr>
               <a:t>يَقُولُونَ إِنَّ الإِنْسَانَ لَا يَخْتَارُ عَائِلَتَهُ، لٰكِنِّي لَوْ خُيِّرْتُ، لَاخْتَرْتُ عَائِلَتِي نَفْسَهَا. نَحْنُ سِتَّةُ أَشْخَاصٍ نَسْكُنُ فِي بَيْتٍ وَاحِدٍ، وَمَعَنَا جَدَّتِي الَّتِي تَحْكِي لَنَا كُلَّ لَيْلَةٍ قِصَصًا عَنْ طُفُولَتِهَا فِي القُدْسِ. أَبِي هَادِئٌ وَحَكِيمٌ، وَأُمِّي نَشِيطَةٌ لَا تَتْعَبُ أَبَدًا.</a:t>
@@ -9375,6 +9441,7 @@
                   <a:srgbClr val="1F2A37"/>
                 </a:solidFill>
                 <a:latin typeface="Amiri" pitchFamily="2" charset="-78"/>
+                <a:ea typeface="Amiri" pitchFamily="2" charset="-78"/>
                 <a:cs typeface="Amiri" pitchFamily="2" charset="-78"/>
               </a:rPr>
               <a:t>عَلَاقَتِي بِإِخْوَتِي لَيْسَتْ مِثَالِيَّةً؛ فَأَنَا أَتَّفِقُ مَعَ أُخْتِي الصُّغْرَى تَمَامًا، أَمَّا أَخِي الأَكْبَرُ فَكُنَّا نَتَشَاجَرُ يَوْمِيًّا وَنَحْنُ صِغَارٌ، لِأَنَّهُ كَانَ يَعْتَبِرُ نَفْسَهُ المَسْؤُولَ عَنِّي، فَيَمْنَعُنِي مِنَ اللَّعِبِ فِي الشَّارِعِ وَيَنْتَقِدُ كُلَّ مَا أَفْعَلُهُ.</a:t>
@@ -9394,6 +9461,7 @@
                   <a:srgbClr val="1F2A37"/>
                 </a:solidFill>
                 <a:latin typeface="Amiri" pitchFamily="2" charset="-78"/>
+                <a:ea typeface="Amiri" pitchFamily="2" charset="-78"/>
                 <a:cs typeface="Amiri" pitchFamily="2" charset="-78"/>
               </a:rPr>
               <a:t>لٰكِنَّ كُلَّ شَيْءٍ تَغَيَّرَ فِي الشِّتَاءِ المَاضِي، عِنْدَمَا كُسِرَتْ رِجْلِي فِي مُبَارَاةٍ؛ فَقَدْ كَانَ أَخِي يَحْمِلُ حَقِيبَتِي، وَيُوصِلُنِي إِلَى المَدْرَسَةِ كُلَّ صَبَاحٍ دُونَ أَنْ يَشْكُوَ. يَوْمَهَا فَهِمْتُ أَنَّ قَسْوَتَهُ كَانَتْ نَوْعًا مِنَ الحُبِّ.</a:t>
@@ -9413,6 +9481,7 @@
                   <a:srgbClr val="1F2A37"/>
                 </a:solidFill>
                 <a:latin typeface="Amiri" pitchFamily="2" charset="-78"/>
+                <a:ea typeface="Amiri" pitchFamily="2" charset="-78"/>
                 <a:cs typeface="Amiri" pitchFamily="2" charset="-78"/>
               </a:rPr>
               <a:t>صَحِيحٌ أَنَّ الأَصْدِقَاءَ يَمْلَؤُونَ أَيَّامَنَا بِالمَرَحِ، غَيْرَ أَنَّ العَائِلَةَ هِيَ الَّتِي تَبْقَى عِنْدَمَا يَصْعُبُ كُلُّ شَيْءٍ. وَفِي المُسْتَقْبَلِ، عِنْدَمَا يُسَافِرُ أَخِي لِلدِّرَاسَةِ، سَأَتَّصِلُ بِهِ كُلَّ أُسْبُوعٍ، وَسَأَحْكِي لَهُ كُلَّ أَخْبَارِ البَيْتِ.</a:t>
@@ -9511,11 +9580,12 @@
               <a:buNone/>
             </a:pPr>
             <a:r>
-              <a:rPr lang="en-US" sz="950" b="1" dirty="0">
+              <a:rPr lang="ar-SA" sz="950" b="1" dirty="0">
                 <a:solidFill>
                   <a:srgbClr val="FFFFFF"/>
                 </a:solidFill>
                 <a:latin typeface="Calibri" pitchFamily="34" charset="0"/>
+                <a:ea typeface="Amiri" pitchFamily="2" charset="-78"/>
                 <a:cs typeface="Amiri" pitchFamily="2" charset="-78"/>
               </a:rPr>
               <a:t>لَوْ خُيِّرْتُ، لَاخْتَرْتُ</a:t>
@@ -9576,11 +9646,12 @@
               <a:buNone/>
             </a:pPr>
             <a:r>
-              <a:rPr lang="en-US" sz="950" b="1" dirty="0">
+              <a:rPr lang="ar-SA" sz="950" b="1" dirty="0">
                 <a:solidFill>
                   <a:srgbClr val="FFFFFF"/>
                 </a:solidFill>
                 <a:latin typeface="Calibri" pitchFamily="34" charset="0"/>
+                <a:ea typeface="Amiri" pitchFamily="2" charset="-78"/>
                 <a:cs typeface="Amiri" pitchFamily="2" charset="-78"/>
               </a:rPr>
               <a:t>أَمَّا أَخِي … فَكُنَّا نَتَشَاجَرُ</a:t>
@@ -9641,11 +9712,12 @@
               <a:buNone/>
             </a:pPr>
             <a:r>
-              <a:rPr lang="en-US" sz="950" b="1" dirty="0">
+              <a:rPr lang="ar-SA" sz="950" b="1" dirty="0">
                 <a:solidFill>
                   <a:srgbClr val="FFFFFF"/>
                 </a:solidFill>
                 <a:latin typeface="Calibri" pitchFamily="34" charset="0"/>
+                <a:ea typeface="Amiri" pitchFamily="2" charset="-78"/>
                 <a:cs typeface="Amiri" pitchFamily="2" charset="-78"/>
               </a:rPr>
               <a:t>دُونَ أَنْ يَشْكُوَ</a:t>
@@ -9706,11 +9778,12 @@
               <a:buNone/>
             </a:pPr>
             <a:r>
-              <a:rPr lang="en-US" sz="950" b="1" dirty="0">
+              <a:rPr lang="ar-SA" sz="950" b="1" dirty="0">
                 <a:solidFill>
                   <a:srgbClr val="FFFFFF"/>
                 </a:solidFill>
                 <a:latin typeface="Calibri" pitchFamily="34" charset="0"/>
+                <a:ea typeface="Amiri" pitchFamily="2" charset="-78"/>
                 <a:cs typeface="Amiri" pitchFamily="2" charset="-78"/>
               </a:rPr>
               <a:t>هِيَ الَّتِي تَبْقَى</a:t>
@@ -9844,6 +9917,7 @@
                   <a:srgbClr val="D4AF37"/>
                 </a:solidFill>
                 <a:latin typeface="Amiri" pitchFamily="2" charset="-78"/>
+                <a:ea typeface="Amiri" pitchFamily="2" charset="-78"/>
                 <a:cs typeface="Amiri" pitchFamily="2" charset="-78"/>
               </a:rPr>
               <a:t>م</a:t>
@@ -10101,6 +10175,7 @@
                   <a:srgbClr val="8A6D1E"/>
                 </a:solidFill>
                 <a:latin typeface="Amiri" pitchFamily="2" charset="-78"/>
+                <a:ea typeface="Amiri" pitchFamily="2" charset="-78"/>
                 <a:cs typeface="Amiri" pitchFamily="2" charset="-78"/>
               </a:rPr>
               <a:t>ب</a:t>
@@ -10165,6 +10240,7 @@
                   <a:srgbClr val="1B3B6F"/>
                 </a:solidFill>
                 <a:latin typeface="Amiri" pitchFamily="2" charset="-78"/>
+                <a:ea typeface="Amiri" pitchFamily="2" charset="-78"/>
                 <a:cs typeface="Amiri" pitchFamily="2" charset="-78"/>
               </a:rPr>
               <a:t>ب</a:t>
@@ -10216,6 +10292,7 @@
                   <a:srgbClr val="8A6D1E"/>
                 </a:solidFill>
                 <a:latin typeface="Amiri" pitchFamily="2" charset="-78"/>
+                <a:ea typeface="Amiri" pitchFamily="2" charset="-78"/>
                 <a:cs typeface="Amiri" pitchFamily="2" charset="-78"/>
               </a:rPr>
               <a:t>نَمُوذَجُ الإِجَابَةِ</a:t>
@@ -10329,6 +10406,7 @@
                   <a:srgbClr val="1F2A37"/>
                 </a:solidFill>
                 <a:latin typeface="Amiri" pitchFamily="2" charset="-78"/>
+                <a:ea typeface="Amiri" pitchFamily="2" charset="-78"/>
                 <a:cs typeface="Amiri" pitchFamily="2" charset="-78"/>
               </a:rPr>
               <a:t>تَغَيَّرَتِ الصَّدَاقَةُ كَثِيرًا فِي عَصْرِ الإِنْتَرْنِتِ؛ فَأَصْبَحَ عِنْدَ كَثِيرٍ مِنَ الشَّبَابِ مِئَاتُ «الأَصْدِقَاءِ» عَلَى وَسَائِلِ التَّوَاصُلِ، لٰكِنَّهُمْ لَا يَعْرِفُونَ إِلَّا القَلِيلَ مِنْهُمْ فِي الحَيَاةِ الحَقِيقِيَّةِ، وَقَدْ يَشْعُرُونَ بِالوَحْدَةِ رَغْمَ هٰذَا العَدَدِ الكَبِيرِ.</a:t>
@@ -10348,6 +10426,7 @@
                   <a:srgbClr val="1F2A37"/>
                 </a:solidFill>
                 <a:latin typeface="Amiri" pitchFamily="2" charset="-78"/>
+                <a:ea typeface="Amiri" pitchFamily="2" charset="-78"/>
                 <a:cs typeface="Amiri" pitchFamily="2" charset="-78"/>
               </a:rPr>
               <a:t>فِي المَاضِي كَانَ الأَصْدِقَاءُ يَلْتَقُونَ فِي الحَيِّ وَالمَسْجِدِ وَالمَدْرَسَةِ، وَيَعْرِفُ كُلٌّ مِنْهُمْ أُسْرَةَ الآخَرِ، أَمَّا اليَوْمَ فَيُمْكِنُ أَنْ تَتَحَدَّثَ مَعَ صَدِيقٍ فِي اليَابَانِ كُلَّ يَوْمٍ دُونَ أَنْ تَرَاهُ أَبَدًا، وَأَنْ تَعْرِفَ عَنْ حَيَاتِهِ أَكْثَرَ مِمَّا تَعْرِفُ عَنْ جِيرَانِكَ.</a:t>
@@ -10367,6 +10446,7 @@
                   <a:srgbClr val="1F2A37"/>
                 </a:solidFill>
                 <a:latin typeface="Amiri" pitchFamily="2" charset="-78"/>
+                <a:ea typeface="Amiri" pitchFamily="2" charset="-78"/>
                 <a:cs typeface="Amiri" pitchFamily="2" charset="-78"/>
               </a:rPr>
               <a:t>لِي تَجْرِبَةٌ مَعَ ذٰلِكَ؛ فَقَدْ تَعَرَّفْتُ قَبْلَ سَنَتَيْنِ إِلَى صَدِيقَةٍ مِنْ تُونِسَ فِي مَجْمُوعَةٍ لِتَعَلُّمِ اللُّغَاتِ، فَكُنَّا نَتَبَادَلُ الرَّسَائِلَ يَوْمِيًّا، وَعِنْدَمَا زُرْتُ تُونِسَ فِي الصَّيْفِ المَاضِي، اسْتَقْبَلَتْنِي أُسْرَتُهَا كَأَنِّي ابْنَتُهُمْ، فَأَصْبَحَتِ الصَّدَاقَةُ الافْتِرَاضِيَّةُ صَدَاقَةً حَقِيقِيَّةً.</a:t>
@@ -10386,6 +10466,7 @@
                   <a:srgbClr val="1F2A37"/>
                 </a:solidFill>
                 <a:latin typeface="Amiri" pitchFamily="2" charset="-78"/>
+                <a:ea typeface="Amiri" pitchFamily="2" charset="-78"/>
                 <a:cs typeface="Amiri" pitchFamily="2" charset="-78"/>
               </a:rPr>
               <a:t>صَحِيحٌ أَنَّ الإِنْتَرْنِتَ يَجْمَعُ النَّاسَ مِنْ كُلِّ العَالَمِ، غَيْرَ أَنَّهُ قَدْ يَجْعَلُنَا نَنْسَى الأَصْدِقَاءَ القَرِيبِينَ مِنَّا. وَلَوْ خَصَّصْنَا وَقْتًا أَسْبُوعِيًّا لِلِقَاءِ أَصْدِقَائِنَا وَجْهًا لِوَجْهٍ، لَأَصْبَحَتْ عَلَاقَاتُنَا أَعْمَقَ وَأَصْدَقَ.</a:t>
@@ -10484,11 +10565,12 @@
               <a:buNone/>
             </a:pPr>
             <a:r>
-              <a:rPr lang="en-US" sz="950" b="1" dirty="0">
+              <a:rPr lang="ar-SA" sz="950" b="1" dirty="0">
                 <a:solidFill>
                   <a:srgbClr val="FFFFFF"/>
                 </a:solidFill>
                 <a:latin typeface="Calibri" pitchFamily="34" charset="0"/>
+                <a:ea typeface="Amiri" pitchFamily="2" charset="-78"/>
                 <a:cs typeface="Amiri" pitchFamily="2" charset="-78"/>
               </a:rPr>
               <a:t>لَا يَعْرِفُونَ إِلَّا القَلِيلَ</a:t>
@@ -10549,11 +10631,12 @@
               <a:buNone/>
             </a:pPr>
             <a:r>
-              <a:rPr lang="en-US" sz="950" b="1" dirty="0">
+              <a:rPr lang="ar-SA" sz="950" b="1" dirty="0">
                 <a:solidFill>
                   <a:srgbClr val="FFFFFF"/>
                 </a:solidFill>
                 <a:latin typeface="Calibri" pitchFamily="34" charset="0"/>
+                <a:ea typeface="Amiri" pitchFamily="2" charset="-78"/>
                 <a:cs typeface="Amiri" pitchFamily="2" charset="-78"/>
               </a:rPr>
               <a:t>أَمَّا اليَوْمَ فَيُمْكِنُ</a:t>
@@ -10614,11 +10697,12 @@
               <a:buNone/>
             </a:pPr>
             <a:r>
-              <a:rPr lang="en-US" sz="950" b="1" dirty="0">
+              <a:rPr lang="ar-SA" sz="950" b="1" dirty="0">
                 <a:solidFill>
                   <a:srgbClr val="FFFFFF"/>
                 </a:solidFill>
                 <a:latin typeface="Calibri" pitchFamily="34" charset="0"/>
+                <a:ea typeface="Amiri" pitchFamily="2" charset="-78"/>
                 <a:cs typeface="Amiri" pitchFamily="2" charset="-78"/>
               </a:rPr>
               <a:t>كَأَنِّي ابْنَتُهُمْ</a:t>
@@ -10679,11 +10763,12 @@
               <a:buNone/>
             </a:pPr>
             <a:r>
-              <a:rPr lang="en-US" sz="950" b="1" dirty="0">
+              <a:rPr lang="ar-SA" sz="950" b="1" dirty="0">
                 <a:solidFill>
                   <a:srgbClr val="FFFFFF"/>
                 </a:solidFill>
                 <a:latin typeface="Calibri" pitchFamily="34" charset="0"/>
+                <a:ea typeface="Amiri" pitchFamily="2" charset="-78"/>
                 <a:cs typeface="Amiri" pitchFamily="2" charset="-78"/>
               </a:rPr>
               <a:t>لَوْ خَصَّصْنَا … لَأَصْبَحَتْ</a:t>
@@ -10817,6 +10902,7 @@
                   <a:srgbClr val="D4AF37"/>
                 </a:solidFill>
                 <a:latin typeface="Amiri" pitchFamily="2" charset="-78"/>
+                <a:ea typeface="Amiri" pitchFamily="2" charset="-78"/>
                 <a:cs typeface="Amiri" pitchFamily="2" charset="-78"/>
               </a:rPr>
               <a:t>م</a:t>
@@ -11137,6 +11223,7 @@
                   <a:srgbClr val="8A6D1E"/>
                 </a:solidFill>
                 <a:latin typeface="Amiri" pitchFamily="2" charset="-78"/>
+                <a:ea typeface="Amiri" pitchFamily="2" charset="-78"/>
                 <a:cs typeface="Amiri" pitchFamily="2" charset="-78"/>
               </a:rPr>
               <a:t>قَيِّمْ عَمَلَكَ</a:t>
@@ -12381,6 +12468,7 @@
                   <a:srgbClr val="FFFFFF"/>
                 </a:solidFill>
                 <a:latin typeface="Amiri" pitchFamily="2" charset="-78"/>
+                <a:ea typeface="Amiri" pitchFamily="2" charset="-78"/>
                 <a:cs typeface="Amiri" pitchFamily="2" charset="-78"/>
               </a:rPr>
               <a:t>أَحْسَنْتُمْ! إِلَى اللِّقَاءِ</a:t>
@@ -12533,6 +12621,7 @@
                   <a:srgbClr val="D4AF37"/>
                 </a:solidFill>
                 <a:latin typeface="Amiri" pitchFamily="2" charset="-78"/>
+                <a:ea typeface="Amiri" pitchFamily="2" charset="-78"/>
                 <a:cs typeface="Amiri" pitchFamily="2" charset="-78"/>
               </a:rPr>
               <a:t>وَرْشَةُ التَّدْرِيبِ</a:t>
@@ -12666,6 +12755,7 @@
                   <a:srgbClr val="D4AF37"/>
                 </a:solidFill>
                 <a:latin typeface="Amiri" pitchFamily="2" charset="-78"/>
+                <a:ea typeface="Amiri" pitchFamily="2" charset="-78"/>
                 <a:cs typeface="Amiri" pitchFamily="2" charset="-78"/>
               </a:rPr>
               <a:t>م</a:t>
@@ -12986,6 +13076,7 @@
                   <a:srgbClr val="8A6D1E"/>
                 </a:solidFill>
                 <a:latin typeface="Amiri" pitchFamily="2" charset="-78"/>
+                <a:ea typeface="Amiri" pitchFamily="2" charset="-78"/>
                 <a:cs typeface="Amiri" pitchFamily="2" charset="-78"/>
               </a:rPr>
               <a:t>آدَابُ الصَّفِّ</a:t>
@@ -14517,6 +14608,7 @@
                   <a:srgbClr val="D4AF37"/>
                 </a:solidFill>
                 <a:latin typeface="Amiri" pitchFamily="2" charset="-78"/>
+                <a:ea typeface="Amiri" pitchFamily="2" charset="-78"/>
                 <a:cs typeface="Amiri" pitchFamily="2" charset="-78"/>
               </a:rPr>
               <a:t>م</a:t>
@@ -14837,6 +14929,7 @@
                   <a:srgbClr val="8A6D1E"/>
                 </a:solidFill>
                 <a:latin typeface="Amiri" pitchFamily="2" charset="-78"/>
+                <a:ea typeface="Amiri" pitchFamily="2" charset="-78"/>
                 <a:cs typeface="Amiri" pitchFamily="2" charset="-78"/>
               </a:rPr>
               <a:t>خَرِيطَةُ الوَرْشَةِ</a:t>
@@ -15151,6 +15244,7 @@
                   <a:srgbClr val="1B3B6F"/>
                 </a:solidFill>
                 <a:latin typeface="Amiri" pitchFamily="2" charset="-78"/>
+                <a:ea typeface="Amiri" pitchFamily="2" charset="-78"/>
                 <a:cs typeface="Amiri" pitchFamily="2" charset="-78"/>
               </a:rPr>
               <a:t>كَيْفَ</a:t>
@@ -15427,6 +15521,7 @@
                   <a:srgbClr val="1E6B52"/>
                 </a:solidFill>
                 <a:latin typeface="Amiri" pitchFamily="2" charset="-78"/>
+                <a:ea typeface="Amiri" pitchFamily="2" charset="-78"/>
                 <a:cs typeface="Amiri" pitchFamily="2" charset="-78"/>
               </a:rPr>
               <a:t>الاسْتِمَارَةُ</a:t>
@@ -15703,6 +15798,7 @@
                   <a:srgbClr val="1E6B52"/>
                 </a:solidFill>
                 <a:latin typeface="Amiri" pitchFamily="2" charset="-78"/>
+                <a:ea typeface="Amiri" pitchFamily="2" charset="-78"/>
                 <a:cs typeface="Amiri" pitchFamily="2" charset="-78"/>
               </a:rPr>
               <a:t>الرِّسَالَةُ</a:t>
@@ -15979,6 +16075,7 @@
                   <a:srgbClr val="1E6B52"/>
                 </a:solidFill>
                 <a:latin typeface="Amiri" pitchFamily="2" charset="-78"/>
+                <a:ea typeface="Amiri" pitchFamily="2" charset="-78"/>
                 <a:cs typeface="Amiri" pitchFamily="2" charset="-78"/>
               </a:rPr>
               <a:t>المَقَالُ</a:t>
@@ -16255,6 +16352,7 @@
                   <a:srgbClr val="8A6D1E"/>
                 </a:solidFill>
                 <a:latin typeface="Amiri" pitchFamily="2" charset="-78"/>
+                <a:ea typeface="Amiri" pitchFamily="2" charset="-78"/>
                 <a:cs typeface="Amiri" pitchFamily="2" charset="-78"/>
               </a:rPr>
               <a:t>قَيِّمْ</a:t>
@@ -16498,6 +16596,7 @@
                   <a:srgbClr val="D4AF37"/>
                 </a:solidFill>
                 <a:latin typeface="Amiri" pitchFamily="2" charset="-78"/>
+                <a:ea typeface="Amiri" pitchFamily="2" charset="-78"/>
                 <a:cs typeface="Amiri" pitchFamily="2" charset="-78"/>
               </a:rPr>
               <a:t>م</a:t>
@@ -16818,6 +16917,7 @@
                   <a:srgbClr val="8A6D1E"/>
                 </a:solidFill>
                 <a:latin typeface="Amiri" pitchFamily="2" charset="-78"/>
+                <a:ea typeface="Amiri" pitchFamily="2" charset="-78"/>
                 <a:cs typeface="Amiri" pitchFamily="2" charset="-78"/>
               </a:rPr>
               <a:t>امْتِحَانُ الكِتَابَةِ</a:t>
@@ -17442,6 +17542,7 @@
                   <a:srgbClr val="1B3B6F"/>
                 </a:solidFill>
                 <a:latin typeface="Amiri" pitchFamily="2" charset="-78"/>
+                <a:ea typeface="Amiri" pitchFamily="2" charset="-78"/>
                 <a:cs typeface="Amiri" pitchFamily="2" charset="-78"/>
               </a:rPr>
               <a:t>عِنْدِي أُخْتَانِ: الكُبْرَى … وَالصُّغْرَى …</a:t>
@@ -17541,6 +17642,7 @@
                   <a:srgbClr val="1B3B6F"/>
                 </a:solidFill>
                 <a:latin typeface="Amiri" pitchFamily="2" charset="-78"/>
+                <a:ea typeface="Amiri" pitchFamily="2" charset="-78"/>
                 <a:cs typeface="Amiri" pitchFamily="2" charset="-78"/>
               </a:rPr>
               <a:t>أَتَّفِقُ مَعَهُمَا عَادَةً، غَيْرَ أَنَّنَا …</a:t>
@@ -17640,6 +17742,7 @@
                   <a:srgbClr val="1B3B6F"/>
                 </a:solidFill>
                 <a:latin typeface="Amiri" pitchFamily="2" charset="-78"/>
+                <a:ea typeface="Amiri" pitchFamily="2" charset="-78"/>
                 <a:cs typeface="Amiri" pitchFamily="2" charset="-78"/>
               </a:rPr>
               <a:t>أَعْرِفُهُ مُنْذُ عَشْرِ سَنَوَاتٍ</a:t>
@@ -17811,6 +17914,7 @@
                   <a:srgbClr val="D4AF37"/>
                 </a:solidFill>
                 <a:latin typeface="Amiri" pitchFamily="2" charset="-78"/>
+                <a:ea typeface="Amiri" pitchFamily="2" charset="-78"/>
                 <a:cs typeface="Amiri" pitchFamily="2" charset="-78"/>
               </a:rPr>
               <a:t>م</a:t>
@@ -18131,6 +18235,7 @@
                   <a:srgbClr val="8A6D1E"/>
                 </a:solidFill>
                 <a:latin typeface="Amiri" pitchFamily="2" charset="-78"/>
+                <a:ea typeface="Amiri" pitchFamily="2" charset="-78"/>
                 <a:cs typeface="Amiri" pitchFamily="2" charset="-78"/>
               </a:rPr>
               <a:t>اسْتِمَارَةُ مَعْلُومَاتِ الأُسْرَةِ</a:t>
@@ -18487,6 +18592,7 @@
                   <a:srgbClr val="1B3B6F"/>
                 </a:solidFill>
                 <a:latin typeface="Amiri" pitchFamily="2" charset="-78"/>
+                <a:ea typeface="Amiri" pitchFamily="2" charset="-78"/>
                 <a:cs typeface="Amiri" pitchFamily="2" charset="-78"/>
               </a:rPr>
               <a:t>اسْمُ الطَّالِبِ</a:t>
@@ -18731,6 +18837,7 @@
                   <a:srgbClr val="1B3B6F"/>
                 </a:solidFill>
                 <a:latin typeface="Amiri" pitchFamily="2" charset="-78"/>
+                <a:ea typeface="Amiri" pitchFamily="2" charset="-78"/>
                 <a:cs typeface="Amiri" pitchFamily="2" charset="-78"/>
               </a:rPr>
               <a:t>اسْمُ الأَبِ وَعَمَلُهُ</a:t>
@@ -18975,6 +19082,7 @@
                   <a:srgbClr val="1B3B6F"/>
                 </a:solidFill>
                 <a:latin typeface="Amiri" pitchFamily="2" charset="-78"/>
+                <a:ea typeface="Amiri" pitchFamily="2" charset="-78"/>
                 <a:cs typeface="Amiri" pitchFamily="2" charset="-78"/>
               </a:rPr>
               <a:t>اسْمُ الأُمِّ وَعَمَلُهَا</a:t>
@@ -19219,6 +19327,7 @@
                   <a:srgbClr val="1B3B6F"/>
                 </a:solidFill>
                 <a:latin typeface="Amiri" pitchFamily="2" charset="-78"/>
+                <a:ea typeface="Amiri" pitchFamily="2" charset="-78"/>
                 <a:cs typeface="Amiri" pitchFamily="2" charset="-78"/>
               </a:rPr>
               <a:t>عَدَدُ الإِخْوَةِ وَالأَخَوَاتِ</a:t>
@@ -19463,6 +19572,7 @@
                   <a:srgbClr val="1B3B6F"/>
                 </a:solidFill>
                 <a:latin typeface="Amiri" pitchFamily="2" charset="-78"/>
+                <a:ea typeface="Amiri" pitchFamily="2" charset="-78"/>
                 <a:cs typeface="Amiri" pitchFamily="2" charset="-78"/>
               </a:rPr>
               <a:t>شَخْصٌ آخَرُ يَسْكُنُ مَعَكَ</a:t>
@@ -19707,6 +19817,7 @@
                   <a:srgbClr val="1B3B6F"/>
                 </a:solidFill>
                 <a:latin typeface="Amiri" pitchFamily="2" charset="-78"/>
+                <a:ea typeface="Amiri" pitchFamily="2" charset="-78"/>
                 <a:cs typeface="Amiri" pitchFamily="2" charset="-78"/>
               </a:rPr>
               <a:t>رَقْمُ هَاتِفٍ لِلطَّوَارِئِ</a:t>
@@ -19951,6 +20062,7 @@
                   <a:srgbClr val="1B3B6F"/>
                 </a:solidFill>
                 <a:latin typeface="Amiri" pitchFamily="2" charset="-78"/>
+                <a:ea typeface="Amiri" pitchFamily="2" charset="-78"/>
                 <a:cs typeface="Amiri" pitchFamily="2" charset="-78"/>
               </a:rPr>
               <a:t>اسْمُ صَدِيقِكَ المُفَضَّلِ فِي الصَّفِّ</a:t>
@@ -20130,6 +20242,7 @@
                   <a:srgbClr val="1B3B6F"/>
                 </a:solidFill>
                 <a:latin typeface="Amiri" pitchFamily="2" charset="-78"/>
+                <a:ea typeface="Amiri" pitchFamily="2" charset="-78"/>
                 <a:cs typeface="Amiri" pitchFamily="2" charset="-78"/>
               </a:rPr>
               <a:t>جُمْلَةٌ: مَنْ يُسَاعِدُكَ فِي الوَاجِبَاتِ؟</a:t>
@@ -20339,6 +20452,7 @@
                   <a:srgbClr val="D4AF37"/>
                 </a:solidFill>
                 <a:latin typeface="Amiri" pitchFamily="2" charset="-78"/>
+                <a:ea typeface="Amiri" pitchFamily="2" charset="-78"/>
                 <a:cs typeface="Amiri" pitchFamily="2" charset="-78"/>
               </a:rPr>
               <a:t>م</a:t>
@@ -20659,6 +20773,7 @@
                   <a:srgbClr val="8A6D1E"/>
                 </a:solidFill>
                 <a:latin typeface="Amiri" pitchFamily="2" charset="-78"/>
+                <a:ea typeface="Amiri" pitchFamily="2" charset="-78"/>
                 <a:cs typeface="Amiri" pitchFamily="2" charset="-78"/>
               </a:rPr>
               <a:t>نَمُوذَجُ الإِجَابَةِ</a:t>
@@ -20977,6 +21092,7 @@
                   <a:srgbClr val="1B3B6F"/>
                 </a:solidFill>
                 <a:latin typeface="Amiri" pitchFamily="2" charset="-78"/>
+                <a:ea typeface="Amiri" pitchFamily="2" charset="-78"/>
                 <a:cs typeface="Amiri" pitchFamily="2" charset="-78"/>
               </a:rPr>
               <a:t>عُمَرُ أَحْمَدُ</a:t>
@@ -21015,6 +21131,7 @@
                   <a:srgbClr val="1B3B6F"/>
                 </a:solidFill>
                 <a:latin typeface="Amiri" pitchFamily="2" charset="-78"/>
+                <a:ea typeface="Amiri" pitchFamily="2" charset="-78"/>
                 <a:cs typeface="Amiri" pitchFamily="2" charset="-78"/>
               </a:rPr>
               <a:t>اسْمُ الطَّالِبِ</a:t>
@@ -21156,6 +21273,7 @@
                   <a:srgbClr val="1B3B6F"/>
                 </a:solidFill>
                 <a:latin typeface="Amiri" pitchFamily="2" charset="-78"/>
+                <a:ea typeface="Amiri" pitchFamily="2" charset="-78"/>
                 <a:cs typeface="Amiri" pitchFamily="2" charset="-78"/>
               </a:rPr>
               <a:t>أَحْمَدُ، مُهَنْدِسٌ</a:t>
@@ -21194,6 +21312,7 @@
                   <a:srgbClr val="1B3B6F"/>
                 </a:solidFill>
                 <a:latin typeface="Amiri" pitchFamily="2" charset="-78"/>
+                <a:ea typeface="Amiri" pitchFamily="2" charset="-78"/>
                 <a:cs typeface="Amiri" pitchFamily="2" charset="-78"/>
               </a:rPr>
               <a:t>اسْمُ الأَبِ وَعَمَلُهُ</a:t>
@@ -21335,6 +21454,7 @@
                   <a:srgbClr val="1B3B6F"/>
                 </a:solidFill>
                 <a:latin typeface="Amiri" pitchFamily="2" charset="-78"/>
+                <a:ea typeface="Amiri" pitchFamily="2" charset="-78"/>
                 <a:cs typeface="Amiri" pitchFamily="2" charset="-78"/>
               </a:rPr>
               <a:t>هُدَى، مُعَلِّمَةٌ</a:t>
@@ -21373,6 +21493,7 @@
                   <a:srgbClr val="1B3B6F"/>
                 </a:solidFill>
                 <a:latin typeface="Amiri" pitchFamily="2" charset="-78"/>
+                <a:ea typeface="Amiri" pitchFamily="2" charset="-78"/>
                 <a:cs typeface="Amiri" pitchFamily="2" charset="-78"/>
               </a:rPr>
               <a:t>اسْمُ الأُمِّ وَعَمَلُهَا</a:t>
@@ -21514,6 +21635,7 @@
                   <a:srgbClr val="1B3B6F"/>
                 </a:solidFill>
                 <a:latin typeface="Amiri" pitchFamily="2" charset="-78"/>
+                <a:ea typeface="Amiri" pitchFamily="2" charset="-78"/>
                 <a:cs typeface="Amiri" pitchFamily="2" charset="-78"/>
               </a:rPr>
               <a:t>أُخْتَانِ</a:t>
@@ -21552,6 +21674,7 @@
                   <a:srgbClr val="1B3B6F"/>
                 </a:solidFill>
                 <a:latin typeface="Amiri" pitchFamily="2" charset="-78"/>
+                <a:ea typeface="Amiri" pitchFamily="2" charset="-78"/>
                 <a:cs typeface="Amiri" pitchFamily="2" charset="-78"/>
               </a:rPr>
               <a:t>عَدَدُ الإِخْوَةِ وَالأَخَوَاتِ</a:t>
@@ -21693,6 +21816,7 @@
                   <a:srgbClr val="1B3B6F"/>
                 </a:solidFill>
                 <a:latin typeface="Amiri" pitchFamily="2" charset="-78"/>
+                <a:ea typeface="Amiri" pitchFamily="2" charset="-78"/>
                 <a:cs typeface="Amiri" pitchFamily="2" charset="-78"/>
               </a:rPr>
               <a:t>جَدَّتِي</a:t>
@@ -21731,6 +21855,7 @@
                   <a:srgbClr val="1B3B6F"/>
                 </a:solidFill>
                 <a:latin typeface="Amiri" pitchFamily="2" charset="-78"/>
+                <a:ea typeface="Amiri" pitchFamily="2" charset="-78"/>
                 <a:cs typeface="Amiri" pitchFamily="2" charset="-78"/>
               </a:rPr>
               <a:t>شَخْصٌ آخَرُ يَسْكُنُ مَعَكَ</a:t>
@@ -21872,6 +21997,7 @@
                   <a:srgbClr val="1B3B6F"/>
                 </a:solidFill>
                 <a:latin typeface="Amiri" pitchFamily="2" charset="-78"/>
+                <a:ea typeface="Amiri" pitchFamily="2" charset="-78"/>
                 <a:cs typeface="Amiri" pitchFamily="2" charset="-78"/>
               </a:rPr>
               <a:t>٠٧٨٠٠٩٨٧٦٥٤</a:t>
@@ -21910,6 +22036,7 @@
                   <a:srgbClr val="1B3B6F"/>
                 </a:solidFill>
                 <a:latin typeface="Amiri" pitchFamily="2" charset="-78"/>
+                <a:ea typeface="Amiri" pitchFamily="2" charset="-78"/>
                 <a:cs typeface="Amiri" pitchFamily="2" charset="-78"/>
               </a:rPr>
               <a:t>رَقْمُ هَاتِفٍ لِلطَّوَارِئِ</a:t>
@@ -22051,6 +22178,7 @@
                   <a:srgbClr val="1B3B6F"/>
                 </a:solidFill>
                 <a:latin typeface="Amiri" pitchFamily="2" charset="-78"/>
+                <a:ea typeface="Amiri" pitchFamily="2" charset="-78"/>
                 <a:cs typeface="Amiri" pitchFamily="2" charset="-78"/>
               </a:rPr>
               <a:t>سَامِرٌ يُوسُفُ</a:t>
@@ -22089,6 +22217,7 @@
                   <a:srgbClr val="1B3B6F"/>
                 </a:solidFill>
                 <a:latin typeface="Amiri" pitchFamily="2" charset="-78"/>
+                <a:ea typeface="Amiri" pitchFamily="2" charset="-78"/>
                 <a:cs typeface="Amiri" pitchFamily="2" charset="-78"/>
               </a:rPr>
               <a:t>اسْمُ صَدِيقِكَ المُفَضَّلِ فِي الصَّفِّ</a:t>
@@ -22230,6 +22359,7 @@
                   <a:srgbClr val="1B3B6F"/>
                 </a:solidFill>
                 <a:latin typeface="Amiri" pitchFamily="2" charset="-78"/>
+                <a:ea typeface="Amiri" pitchFamily="2" charset="-78"/>
                 <a:cs typeface="Amiri" pitchFamily="2" charset="-78"/>
               </a:rPr>
               <a:t>تُسَاعِدُنِي أُخْتِي الكُبْرَى لِأَنَّهَا تَدْرُسُ فِي الجَامِعَةِ.</a:t>
@@ -22268,6 +22398,7 @@
                   <a:srgbClr val="1B3B6F"/>
                 </a:solidFill>
                 <a:latin typeface="Amiri" pitchFamily="2" charset="-78"/>
+                <a:ea typeface="Amiri" pitchFamily="2" charset="-78"/>
                 <a:cs typeface="Amiri" pitchFamily="2" charset="-78"/>
               </a:rPr>
               <a:t>جُمْلَةٌ: مَنْ يُسَاعِدُكَ فِي الوَاجِبَاتِ؟</a:t>
@@ -22477,6 +22608,7 @@
                   <a:srgbClr val="D4AF37"/>
                 </a:solidFill>
                 <a:latin typeface="Amiri" pitchFamily="2" charset="-78"/>
+                <a:ea typeface="Amiri" pitchFamily="2" charset="-78"/>
                 <a:cs typeface="Amiri" pitchFamily="2" charset="-78"/>
               </a:rPr>
               <a:t>م</a:t>
@@ -22797,6 +22929,7 @@
                   <a:srgbClr val="8A6D1E"/>
                 </a:solidFill>
                 <a:latin typeface="Amiri" pitchFamily="2" charset="-78"/>
+                <a:ea typeface="Amiri" pitchFamily="2" charset="-78"/>
                 <a:cs typeface="Amiri" pitchFamily="2" charset="-78"/>
               </a:rPr>
               <a:t>رِسَالَةٌ عَنْ أُسْرَتِي</a:t>
@@ -23272,6 +23405,7 @@
                   <a:srgbClr val="1B3B6F"/>
                 </a:solidFill>
                 <a:latin typeface="Amiri" pitchFamily="2" charset="-78"/>
+                <a:ea typeface="Amiri" pitchFamily="2" charset="-78"/>
                 <a:cs typeface="Amiri" pitchFamily="2" charset="-78"/>
               </a:rPr>
               <a:t>فِي أُسْرَتِي … أَشْخَاصٍ</a:t>
@@ -23348,6 +23482,7 @@
                   <a:srgbClr val="1B3B6F"/>
                 </a:solidFill>
                 <a:latin typeface="Amiri" pitchFamily="2" charset="-78"/>
+                <a:ea typeface="Amiri" pitchFamily="2" charset="-78"/>
                 <a:cs typeface="Amiri" pitchFamily="2" charset="-78"/>
               </a:rPr>
               <a:t>أَتَّفِقُ مَعَ … لٰكِنِّي أَتَشَاجَرُ مَعَ …</a:t>
@@ -23424,6 +23559,7 @@
                   <a:srgbClr val="1B3B6F"/>
                 </a:solidFill>
                 <a:latin typeface="Amiri" pitchFamily="2" charset="-78"/>
+                <a:ea typeface="Amiri" pitchFamily="2" charset="-78"/>
                 <a:cs typeface="Amiri" pitchFamily="2" charset="-78"/>
               </a:rPr>
               <a:t>صَدِيقِي المُفَضَّلُ اسْمُهُ …</a:t>
@@ -23500,6 +23636,7 @@
                   <a:srgbClr val="1B3B6F"/>
                 </a:solidFill>
                 <a:latin typeface="Amiri" pitchFamily="2" charset="-78"/>
+                <a:ea typeface="Amiri" pitchFamily="2" charset="-78"/>
                 <a:cs typeface="Amiri" pitchFamily="2" charset="-78"/>
               </a:rPr>
               <a:t>فِي العُطْلَةِ القَادِمَةِ سَنَزُورُ …</a:t>
@@ -23671,6 +23808,7 @@
                   <a:srgbClr val="D4AF37"/>
                 </a:solidFill>
                 <a:latin typeface="Amiri" pitchFamily="2" charset="-78"/>
+                <a:ea typeface="Amiri" pitchFamily="2" charset="-78"/>
                 <a:cs typeface="Amiri" pitchFamily="2" charset="-78"/>
               </a:rPr>
               <a:t>م</a:t>
@@ -23991,6 +24129,7 @@
                   <a:srgbClr val="8A6D1E"/>
                 </a:solidFill>
                 <a:latin typeface="Amiri" pitchFamily="2" charset="-78"/>
+                <a:ea typeface="Amiri" pitchFamily="2" charset="-78"/>
                 <a:cs typeface="Amiri" pitchFamily="2" charset="-78"/>
               </a:rPr>
               <a:t>نَصُّ السُّؤَالِ</a:t>
@@ -24271,6 +24410,7 @@
                   <a:srgbClr val="1B3B6F"/>
                 </a:solidFill>
                 <a:latin typeface="Amiri" pitchFamily="2" charset="-78"/>
+                <a:ea typeface="Amiri" pitchFamily="2" charset="-78"/>
                 <a:cs typeface="Amiri" pitchFamily="2" charset="-78"/>
               </a:rPr>
               <a:t>سَأَلَكَ صَدِيقُكَ عَنْ أُسْرَتِكَ. اكْتُبْ لَهُ رِسَالَةً (٨٠–٩٠ كَلِمَةً).</a:t>
@@ -24412,6 +24552,7 @@
                   <a:srgbClr val="1B3B6F"/>
                 </a:solidFill>
                 <a:latin typeface="Amiri" pitchFamily="2" charset="-78"/>
+                <a:ea typeface="Amiri" pitchFamily="2" charset="-78"/>
                 <a:cs typeface="Amiri" pitchFamily="2" charset="-78"/>
               </a:rPr>
               <a:t>مَنْ فِي أُسْرَتِكَ؟ وَمَاذَا يَعْمَلُونَ؟</a:t>
@@ -24553,6 +24694,7 @@
                   <a:srgbClr val="1B3B6F"/>
                 </a:solidFill>
                 <a:latin typeface="Amiri" pitchFamily="2" charset="-78"/>
+                <a:ea typeface="Amiri" pitchFamily="2" charset="-78"/>
                 <a:cs typeface="Amiri" pitchFamily="2" charset="-78"/>
               </a:rPr>
               <a:t>صِفْ إِخْوَتَكَ. هَلْ تَتَّفِقُ مَعَهُمْ؟</a:t>
@@ -24694,6 +24836,7 @@
                   <a:srgbClr val="1B3B6F"/>
                 </a:solidFill>
                 <a:latin typeface="Amiri" pitchFamily="2" charset="-78"/>
+                <a:ea typeface="Amiri" pitchFamily="2" charset="-78"/>
                 <a:cs typeface="Amiri" pitchFamily="2" charset="-78"/>
               </a:rPr>
               <a:t>مَنْ صَدِيقُكَ المُفَضَّلُ؟ وَمَاذَا فَعَلْتُمَا مَعًا مُؤَخَّرًا؟</a:t>
@@ -24835,6 +24978,7 @@
                   <a:srgbClr val="1B3B6F"/>
                 </a:solidFill>
                 <a:latin typeface="Amiri" pitchFamily="2" charset="-78"/>
+                <a:ea typeface="Amiri" pitchFamily="2" charset="-78"/>
                 <a:cs typeface="Amiri" pitchFamily="2" charset="-78"/>
               </a:rPr>
               <a:t>مَا خُطَّةُ أُسْرَتِكَ لِلْعُطْلَةِ القَادِمَةِ؟</a:t>
@@ -25044,6 +25188,7 @@
                   <a:srgbClr val="D4AF37"/>
                 </a:solidFill>
                 <a:latin typeface="Amiri" pitchFamily="2" charset="-78"/>
+                <a:ea typeface="Amiri" pitchFamily="2" charset="-78"/>
                 <a:cs typeface="Amiri" pitchFamily="2" charset="-78"/>
               </a:rPr>
               <a:t>م</a:t>
@@ -25364,6 +25509,7 @@
                   <a:srgbClr val="8A6D1E"/>
                 </a:solidFill>
                 <a:latin typeface="Amiri" pitchFamily="2" charset="-78"/>
+                <a:ea typeface="Amiri" pitchFamily="2" charset="-78"/>
                 <a:cs typeface="Amiri" pitchFamily="2" charset="-78"/>
               </a:rPr>
               <a:t>قَوَالِبُ الكِتَابَةِ</a:t>
@@ -25644,6 +25790,7 @@
                   <a:srgbClr val="1B3B6F"/>
                 </a:solidFill>
                 <a:latin typeface="Amiri" pitchFamily="2" charset="-78"/>
+                <a:ea typeface="Amiri" pitchFamily="2" charset="-78"/>
                 <a:cs typeface="Amiri" pitchFamily="2" charset="-78"/>
               </a:rPr>
               <a:t>مَرْحَبًا يَا ______ ، كَيْفَ حَالُكَ؟</a:t>
@@ -25850,6 +25997,7 @@
                   <a:srgbClr val="1B3B6F"/>
                 </a:solidFill>
                 <a:latin typeface="Amiri" pitchFamily="2" charset="-78"/>
+                <a:ea typeface="Amiri" pitchFamily="2" charset="-78"/>
                 <a:cs typeface="Amiri" pitchFamily="2" charset="-78"/>
               </a:rPr>
               <a:t>فِي أُسْرَتِي ______ أَشْخَاصٍ. أَبِي ______ ، وَأُمِّي ______ .</a:t>
@@ -26056,6 +26204,7 @@
                   <a:srgbClr val="1B3B6F"/>
                 </a:solidFill>
                 <a:latin typeface="Amiri" pitchFamily="2" charset="-78"/>
+                <a:ea typeface="Amiri" pitchFamily="2" charset="-78"/>
                 <a:cs typeface="Amiri" pitchFamily="2" charset="-78"/>
               </a:rPr>
               <a:t>عِنْدِي ______ . أَتَّفِقُ مَعَ ______ ، لٰكِنِّي ______ .</a:t>
@@ -26262,6 +26411,7 @@
                   <a:srgbClr val="1B3B6F"/>
                 </a:solidFill>
                 <a:latin typeface="Amiri" pitchFamily="2" charset="-78"/>
+                <a:ea typeface="Amiri" pitchFamily="2" charset="-78"/>
                 <a:cs typeface="Amiri" pitchFamily="2" charset="-78"/>
               </a:rPr>
               <a:t>صَدِيقِي المُفَضَّلُ اسْمُهُ ______ . أَمْسِ ______ مَعًا.</a:t>
@@ -26468,6 +26618,7 @@
                   <a:srgbClr val="1B3B6F"/>
                 </a:solidFill>
                 <a:latin typeface="Amiri" pitchFamily="2" charset="-78"/>
+                <a:ea typeface="Amiri" pitchFamily="2" charset="-78"/>
                 <a:cs typeface="Amiri" pitchFamily="2" charset="-78"/>
               </a:rPr>
               <a:t>فِي العُطْلَةِ القَادِمَةِ سَنَزُورُ ______ .</a:t>
@@ -26674,6 +26825,7 @@
                   <a:srgbClr val="1B3B6F"/>
                 </a:solidFill>
                 <a:latin typeface="Amiri" pitchFamily="2" charset="-78"/>
+                <a:ea typeface="Amiri" pitchFamily="2" charset="-78"/>
                 <a:cs typeface="Amiri" pitchFamily="2" charset="-78"/>
               </a:rPr>
               <a:t>مَعَ السَّلَامَةِ، ______</a:t>
@@ -26913,13 +27065,9 @@
     <a:fontScheme name="Office">
       <a:majorFont>
         <a:latin typeface="Calibri Light" panose="020F0302020204030204"/>
-        <a:ea typeface=""/>
-        <a:cs typeface=""/>
-        <a:font script="Jpan" typeface="游ゴシック Light"/>
-        <a:font script="Hang" typeface="맑은 고딕"/>
-        <a:font script="Hans" typeface="等线 Light"/>
-        <a:font script="Hant" typeface="新細明體"/>
-        <a:font script="Arab" typeface="Times New Roman"/>
+        <a:ea typeface="Amiri" pitchFamily="2" charset="-78"/>
+        <a:cs typeface="Amiri" pitchFamily="2" charset="-78"/>
+        <a:font script="Arab" typeface="Amiri"/>
         <a:font script="Hebr" typeface="Times New Roman"/>
         <a:font script="Thai" typeface="Angsana New"/>
         <a:font script="Ethi" typeface="Nyala"/>
@@ -26965,13 +27113,9 @@
       </a:majorFont>
       <a:minorFont>
         <a:latin typeface="Calibri" panose="020F0502020204030204"/>
-        <a:ea typeface=""/>
-        <a:cs typeface=""/>
-        <a:font script="Jpan" typeface="游ゴシック"/>
-        <a:font script="Hang" typeface="맑은 고딕"/>
-        <a:font script="Hans" typeface="等线"/>
-        <a:font script="Hant" typeface="新細明體"/>
-        <a:font script="Arab" typeface="Arial"/>
+        <a:ea typeface="Amiri" pitchFamily="2" charset="-78"/>
+        <a:cs typeface="Amiri" pitchFamily="2" charset="-78"/>
+        <a:font script="Arab" typeface="Amiri"/>
         <a:font script="Hebr" typeface="Arial"/>
         <a:font script="Thai" typeface="Cordia New"/>
         <a:font script="Ethi" typeface="Nyala"/>

--- a/Topic_B/Exam_Practice/TB-L02_Writing_Workshop_Family_Friends_and_Relationships.pptx
+++ b/Topic_B/Exam_Practice/TB-L02_Writing_Workshop_Family_Friends_and_Relationships.pptx
@@ -3848,7 +3848,7 @@
                 <a:solidFill>
                   <a:srgbClr val="FFFFFF"/>
                 </a:solidFill>
-                <a:latin typeface="Calibri" pitchFamily="34" charset="0"/>
+                <a:latin typeface="Amiri" pitchFamily="2" charset="-78"/>
                 <a:ea typeface="Amiri" pitchFamily="2" charset="-78"/>
                 <a:cs typeface="Amiri" pitchFamily="2" charset="-78"/>
               </a:rPr>
@@ -3914,7 +3914,7 @@
                 <a:solidFill>
                   <a:srgbClr val="FFFFFF"/>
                 </a:solidFill>
-                <a:latin typeface="Calibri" pitchFamily="34" charset="0"/>
+                <a:latin typeface="Amiri" pitchFamily="2" charset="-78"/>
                 <a:ea typeface="Amiri" pitchFamily="2" charset="-78"/>
                 <a:cs typeface="Amiri" pitchFamily="2" charset="-78"/>
               </a:rPr>
@@ -3980,7 +3980,7 @@
                 <a:solidFill>
                   <a:srgbClr val="FFFFFF"/>
                 </a:solidFill>
-                <a:latin typeface="Calibri" pitchFamily="34" charset="0"/>
+                <a:latin typeface="Amiri" pitchFamily="2" charset="-78"/>
                 <a:ea typeface="Amiri" pitchFamily="2" charset="-78"/>
                 <a:cs typeface="Amiri" pitchFamily="2" charset="-78"/>
               </a:rPr>
@@ -4046,7 +4046,7 @@
                 <a:solidFill>
                   <a:srgbClr val="FFFFFF"/>
                 </a:solidFill>
-                <a:latin typeface="Calibri" pitchFamily="34" charset="0"/>
+                <a:latin typeface="Amiri" pitchFamily="2" charset="-78"/>
                 <a:ea typeface="Amiri" pitchFamily="2" charset="-78"/>
                 <a:cs typeface="Amiri" pitchFamily="2" charset="-78"/>
               </a:rPr>
@@ -4844,7 +4844,7 @@
                 <a:solidFill>
                   <a:srgbClr val="FFFFFF"/>
                 </a:solidFill>
-                <a:latin typeface="Calibri" pitchFamily="34" charset="0"/>
+                <a:latin typeface="Amiri" pitchFamily="2" charset="-78"/>
                 <a:ea typeface="Amiri" pitchFamily="2" charset="-78"/>
                 <a:cs typeface="Amiri" pitchFamily="2" charset="-78"/>
               </a:rPr>
@@ -4910,7 +4910,7 @@
                 <a:solidFill>
                   <a:srgbClr val="FFFFFF"/>
                 </a:solidFill>
-                <a:latin typeface="Calibri" pitchFamily="34" charset="0"/>
+                <a:latin typeface="Amiri" pitchFamily="2" charset="-78"/>
                 <a:ea typeface="Amiri" pitchFamily="2" charset="-78"/>
                 <a:cs typeface="Amiri" pitchFamily="2" charset="-78"/>
               </a:rPr>
@@ -4976,7 +4976,7 @@
                 <a:solidFill>
                   <a:srgbClr val="FFFFFF"/>
                 </a:solidFill>
-                <a:latin typeface="Calibri" pitchFamily="34" charset="0"/>
+                <a:latin typeface="Amiri" pitchFamily="2" charset="-78"/>
                 <a:ea typeface="Amiri" pitchFamily="2" charset="-78"/>
                 <a:cs typeface="Amiri" pitchFamily="2" charset="-78"/>
               </a:rPr>
@@ -5042,7 +5042,7 @@
                 <a:solidFill>
                   <a:srgbClr val="FFFFFF"/>
                 </a:solidFill>
-                <a:latin typeface="Calibri" pitchFamily="34" charset="0"/>
+                <a:latin typeface="Amiri" pitchFamily="2" charset="-78"/>
                 <a:ea typeface="Amiri" pitchFamily="2" charset="-78"/>
                 <a:cs typeface="Amiri" pitchFamily="2" charset="-78"/>
               </a:rPr>
@@ -8599,7 +8599,7 @@
                 <a:solidFill>
                   <a:srgbClr val="FFFFFF"/>
                 </a:solidFill>
-                <a:latin typeface="Calibri" pitchFamily="34" charset="0"/>
+                <a:latin typeface="Amiri" pitchFamily="2" charset="-78"/>
                 <a:ea typeface="Amiri" pitchFamily="2" charset="-78"/>
                 <a:cs typeface="Amiri" pitchFamily="2" charset="-78"/>
               </a:rPr>
@@ -8665,7 +8665,7 @@
                 <a:solidFill>
                   <a:srgbClr val="FFFFFF"/>
                 </a:solidFill>
-                <a:latin typeface="Calibri" pitchFamily="34" charset="0"/>
+                <a:latin typeface="Amiri" pitchFamily="2" charset="-78"/>
                 <a:ea typeface="Amiri" pitchFamily="2" charset="-78"/>
                 <a:cs typeface="Amiri" pitchFamily="2" charset="-78"/>
               </a:rPr>
@@ -8731,7 +8731,7 @@
                 <a:solidFill>
                   <a:srgbClr val="FFFFFF"/>
                 </a:solidFill>
-                <a:latin typeface="Calibri" pitchFamily="34" charset="0"/>
+                <a:latin typeface="Amiri" pitchFamily="2" charset="-78"/>
                 <a:ea typeface="Amiri" pitchFamily="2" charset="-78"/>
                 <a:cs typeface="Amiri" pitchFamily="2" charset="-78"/>
               </a:rPr>
@@ -8797,7 +8797,7 @@
                 <a:solidFill>
                   <a:srgbClr val="FFFFFF"/>
                 </a:solidFill>
-                <a:latin typeface="Calibri" pitchFamily="34" charset="0"/>
+                <a:latin typeface="Amiri" pitchFamily="2" charset="-78"/>
                 <a:ea typeface="Amiri" pitchFamily="2" charset="-78"/>
                 <a:cs typeface="Amiri" pitchFamily="2" charset="-78"/>
               </a:rPr>
@@ -9584,7 +9584,7 @@
                 <a:solidFill>
                   <a:srgbClr val="FFFFFF"/>
                 </a:solidFill>
-                <a:latin typeface="Calibri" pitchFamily="34" charset="0"/>
+                <a:latin typeface="Amiri" pitchFamily="2" charset="-78"/>
                 <a:ea typeface="Amiri" pitchFamily="2" charset="-78"/>
                 <a:cs typeface="Amiri" pitchFamily="2" charset="-78"/>
               </a:rPr>
@@ -9650,7 +9650,7 @@
                 <a:solidFill>
                   <a:srgbClr val="FFFFFF"/>
                 </a:solidFill>
-                <a:latin typeface="Calibri" pitchFamily="34" charset="0"/>
+                <a:latin typeface="Amiri" pitchFamily="2" charset="-78"/>
                 <a:ea typeface="Amiri" pitchFamily="2" charset="-78"/>
                 <a:cs typeface="Amiri" pitchFamily="2" charset="-78"/>
               </a:rPr>
@@ -9716,7 +9716,7 @@
                 <a:solidFill>
                   <a:srgbClr val="FFFFFF"/>
                 </a:solidFill>
-                <a:latin typeface="Calibri" pitchFamily="34" charset="0"/>
+                <a:latin typeface="Amiri" pitchFamily="2" charset="-78"/>
                 <a:ea typeface="Amiri" pitchFamily="2" charset="-78"/>
                 <a:cs typeface="Amiri" pitchFamily="2" charset="-78"/>
               </a:rPr>
@@ -9782,7 +9782,7 @@
                 <a:solidFill>
                   <a:srgbClr val="FFFFFF"/>
                 </a:solidFill>
-                <a:latin typeface="Calibri" pitchFamily="34" charset="0"/>
+                <a:latin typeface="Amiri" pitchFamily="2" charset="-78"/>
                 <a:ea typeface="Amiri" pitchFamily="2" charset="-78"/>
                 <a:cs typeface="Amiri" pitchFamily="2" charset="-78"/>
               </a:rPr>
@@ -10569,7 +10569,7 @@
                 <a:solidFill>
                   <a:srgbClr val="FFFFFF"/>
                 </a:solidFill>
-                <a:latin typeface="Calibri" pitchFamily="34" charset="0"/>
+                <a:latin typeface="Amiri" pitchFamily="2" charset="-78"/>
                 <a:ea typeface="Amiri" pitchFamily="2" charset="-78"/>
                 <a:cs typeface="Amiri" pitchFamily="2" charset="-78"/>
               </a:rPr>
@@ -10635,7 +10635,7 @@
                 <a:solidFill>
                   <a:srgbClr val="FFFFFF"/>
                 </a:solidFill>
-                <a:latin typeface="Calibri" pitchFamily="34" charset="0"/>
+                <a:latin typeface="Amiri" pitchFamily="2" charset="-78"/>
                 <a:ea typeface="Amiri" pitchFamily="2" charset="-78"/>
                 <a:cs typeface="Amiri" pitchFamily="2" charset="-78"/>
               </a:rPr>
@@ -10701,7 +10701,7 @@
                 <a:solidFill>
                   <a:srgbClr val="FFFFFF"/>
                 </a:solidFill>
-                <a:latin typeface="Calibri" pitchFamily="34" charset="0"/>
+                <a:latin typeface="Amiri" pitchFamily="2" charset="-78"/>
                 <a:ea typeface="Amiri" pitchFamily="2" charset="-78"/>
                 <a:cs typeface="Amiri" pitchFamily="2" charset="-78"/>
               </a:rPr>
@@ -10767,7 +10767,7 @@
                 <a:solidFill>
                   <a:srgbClr val="FFFFFF"/>
                 </a:solidFill>
-                <a:latin typeface="Calibri" pitchFamily="34" charset="0"/>
+                <a:latin typeface="Amiri" pitchFamily="2" charset="-78"/>
                 <a:ea typeface="Amiri" pitchFamily="2" charset="-78"/>
                 <a:cs typeface="Amiri" pitchFamily="2" charset="-78"/>
               </a:rPr>
